--- a/zelda_presentation.pptx
+++ b/zelda_presentation.pptx
@@ -3110,7 +3110,7 @@
           <a:lstStyle/>
           <a:p>
             <a:r>
-              <a:t>The Legend of Zelda: A Journey Through Hyrule</a:t>
+              <a:t>The Legend of Zelda</a:t>
             </a:r>
           </a:p>
         </p:txBody>
@@ -3131,7 +3131,7 @@
           <a:lstStyle/>
           <a:p>
             <a:r>
-              <a:t>An Overview of the Iconic Series</a:t>
+              <a:t>A Journey Through Hyrule</a:t>
             </a:r>
           </a:p>
         </p:txBody>
@@ -3191,19 +3191,19 @@
           <a:lstStyle/>
           <a:p>
             <a:r>
-              <a:t>A beloved action-adventure fantasy series created by Nintendo.</a:t>
+              <a:t>A beloved action-adventure video game series created by Shigeru Miyamoto and Takashi Tezuka.</a:t>
             </a:r>
           </a:p>
           <a:p>
             <a:pPr algn="l"/>
             <a:r>
-              <a:t>Follows the hero Link on his quest to save Princess Zelda and Hyrule from the evil Ganon (or Ganondorf).</a:t>
+              <a:t>Known for its exploration, puzzles, combat, and compelling storytelling.</a:t>
             </a:r>
           </a:p>
           <a:p>
             <a:pPr algn="l"/>
             <a:r>
-              <a:t>Known for its exploration, puzzles, combat, and compelling story.</a:t>
+              <a:t>Features recurring characters like Link, Zelda, and Ganon (Ganondorf).</a:t>
             </a:r>
           </a:p>
         </p:txBody>
@@ -3263,19 +3263,19 @@
           <a:lstStyle/>
           <a:p>
             <a:r>
-              <a:t>Link: The Hero of Hyrule, destined to wield the Master Sword and defeat evil.</a:t>
+              <a:t>Link: The Hero of Time, often tasked with saving Hyrule.</a:t>
             </a:r>
           </a:p>
           <a:p>
             <a:pPr algn="l"/>
             <a:r>
-              <a:t>Zelda: The Princess of Hyrule, often possessing wisdom and magical abilities.</a:t>
+              <a:t>Zelda: The Princess of Hyrule, possesses wisdom and often magical powers.</a:t>
             </a:r>
           </a:p>
           <a:p>
             <a:pPr algn="l"/>
             <a:r>
-              <a:t>Ganon/Ganondorf: The primary antagonist, a powerful sorcerer seeking to conquer Hyrule.</a:t>
+              <a:t>Ganon (Ganondorf): The main antagonist, seeking power and control over Hyrule.</a:t>
             </a:r>
           </a:p>
         </p:txBody>
@@ -3314,7 +3314,7 @@
           <a:lstStyle/>
           <a:p>
             <a:r>
-              <a:t>Core Gameplay Elements</a:t>
+              <a:t>Recurring Elements</a:t>
             </a:r>
           </a:p>
         </p:txBody>
@@ -3335,25 +3335,19 @@
           <a:lstStyle/>
           <a:p>
             <a:r>
-              <a:t>Exploration: Discovering Hyrule's vast landscapes, dungeons, and secrets.</a:t>
+              <a:t>The Triforce: A sacred relic embodying power, wisdom, and courage.</a:t>
             </a:r>
           </a:p>
           <a:p>
             <a:pPr algn="l"/>
             <a:r>
-              <a:t>Combat: Engaging enemies with swords, bows, and other weapons.</a:t>
+              <a:t>The Master Sword: A legendary blade capable of vanquishing evil.</a:t>
             </a:r>
           </a:p>
           <a:p>
             <a:pPr algn="l"/>
             <a:r>
-              <a:t>Puzzles: Solving intricate puzzles within dungeons and the overworld.</a:t>
-            </a:r>
-          </a:p>
-          <a:p>
-            <a:pPr algn="l"/>
-            <a:r>
-              <a:t>Items and Equipment: Collecting powerful items like the Hookshot, Bombs, and Bow.</a:t>
+              <a:t>Hyrule: The kingdom where most Zelda games are set.</a:t>
             </a:r>
           </a:p>
         </p:txBody>
@@ -3392,7 +3386,7 @@
           <a:lstStyle/>
           <a:p>
             <a:r>
-              <a:t>Recurring Themes</a:t>
+              <a:t>Popular Titles</a:t>
             </a:r>
           </a:p>
         </p:txBody>
@@ -3413,19 +3407,19 @@
           <a:lstStyle/>
           <a:p>
             <a:r>
-              <a:t>The Triforce: A symbol of power, wisdom, and courage, often sought after by Ganon.</a:t>
+              <a:t>The Legend of Zelda: Ocarina of Time (Nintendo 64)</a:t>
             </a:r>
           </a:p>
           <a:p>
             <a:pPr algn="l"/>
             <a:r>
-              <a:t>The Master Sword: The blade of evil's bane, capable of vanquishing Ganon.</a:t>
+              <a:t>The Legend of Zelda: Breath of the Wild (Nintendo Switch)</a:t>
             </a:r>
           </a:p>
           <a:p>
             <a:pPr algn="l"/>
             <a:r>
-              <a:t>The Cycle of Reincarnation: Link, Zelda, and Ganon are often reborn to repeat their roles.</a:t>
+              <a:t>The Legend of Zelda: A Link to the Past (Super Nintendo)</a:t>
             </a:r>
           </a:p>
         </p:txBody>
@@ -3464,7 +3458,7 @@
           <a:lstStyle/>
           <a:p>
             <a:r>
-              <a:t>Notable Games</a:t>
+              <a:t>Impact and Legacy</a:t>
             </a:r>
           </a:p>
         </p:txBody>
@@ -3485,19 +3479,19 @@
           <a:lstStyle/>
           <a:p>
             <a:r>
-              <a:t>The Legend of Zelda (NES, 1986): The game that started it all.</a:t>
+              <a:t>The Legend of Zelda has had a profound impact on the video game industry.</a:t>
             </a:r>
           </a:p>
           <a:p>
             <a:pPr algn="l"/>
             <a:r>
-              <a:t>The Legend of Zelda: Ocarina of Time (N64, 1998): Widely considered one of the greatest games of all time.</a:t>
+              <a:t>It is renowned for its innovative gameplay, memorable characters, and captivating worlds.</a:t>
             </a:r>
           </a:p>
           <a:p>
             <a:pPr algn="l"/>
             <a:r>
-              <a:t>The Legend of Zelda: Breath of the Wild (Switch, 2017): A revolutionary open-world adventure.</a:t>
+              <a:t>The series continues to be a major influence on game design and storytelling.</a:t>
             </a:r>
           </a:p>
         </p:txBody>
@@ -3559,11 +3553,27 @@
           </a:bodyPr>
           <a:lstStyle/>
           <a:p>
+            <a:pPr>
+              <a:defRPr sz="4400">
+                <a:solidFill>
+                  <a:srgbClr val="0B0B0B"/>
+                </a:solidFill>
+              </a:defRPr>
+            </a:pPr>
+            <a:r>
+              <a:t>Thank You!</a:t>
+            </a:r>
+          </a:p>
+          <a:p>
             <a:pPr algn="ctr">
-              <a:defRPr sz="3600"/>
+              <a:defRPr sz="4400">
+                <a:solidFill>
+                  <a:srgbClr val="0B0B0B"/>
+                </a:solidFill>
+              </a:defRPr>
             </a:pPr>
             <a:r>
-              <a:t>The Legend of Zelda continues to captivate audiences with its timeless adventures and compelling characters.  Thank you!</a:t>
+              <a:t>Any Questions?</a:t>
             </a:r>
           </a:p>
         </p:txBody>
